--- a/Cátedra/0. Presentación del curso/DBG_2s2026_00_Presentacion_Curso.pptx
+++ b/Cátedra/0. Presentación del curso/DBG_2s2026_00_Presentacion_Curso.pptx
@@ -11957,7 +11957,7 @@
                           </a:solidFill>
                           <a:latin typeface="Calibri"/>
                         </a:rPr>
-                        <a:t>Requerimientos, modelado del espacio (ISO 19109/19110) y modelo ER</a:t>
+                        <a:t>Requerimientos, modelado del espacio (ISO 19109/19110), modelo ER y lógico</a:t>
                       </a:r>
                     </a:p>
                   </a:txBody>
